--- a/ゲーム科1年/01_後期/プログラミングⅢ/16_動的配列クラス.pptx
+++ b/ゲーム科1年/01_後期/プログラミングⅢ/16_動的配列クラス.pptx
@@ -267,7 +267,7 @@
           <a:p>
             <a:fld id="{E9CC885B-4903-4D54-9A93-00025F12DED9}" type="datetimeFigureOut">
               <a:rPr kumimoji="1" lang="ja-JP" altLang="en-US" smtClean="0"/>
-              <a:t>2024/11/12</a:t>
+              <a:t>2025/3/3</a:t>
             </a:fld>
             <a:endParaRPr kumimoji="1" lang="ja-JP" altLang="en-US"/>
           </a:p>
@@ -497,7 +497,7 @@
           <a:p>
             <a:fld id="{E9CC885B-4903-4D54-9A93-00025F12DED9}" type="datetimeFigureOut">
               <a:rPr kumimoji="1" lang="ja-JP" altLang="en-US" smtClean="0"/>
-              <a:t>2024/11/12</a:t>
+              <a:t>2025/3/3</a:t>
             </a:fld>
             <a:endParaRPr kumimoji="1" lang="ja-JP" altLang="en-US"/>
           </a:p>
@@ -737,7 +737,7 @@
           <a:p>
             <a:fld id="{E9CC885B-4903-4D54-9A93-00025F12DED9}" type="datetimeFigureOut">
               <a:rPr kumimoji="1" lang="ja-JP" altLang="en-US" smtClean="0"/>
-              <a:t>2024/11/12</a:t>
+              <a:t>2025/3/3</a:t>
             </a:fld>
             <a:endParaRPr kumimoji="1" lang="ja-JP" altLang="en-US"/>
           </a:p>
@@ -967,7 +967,7 @@
           <a:p>
             <a:fld id="{E9CC885B-4903-4D54-9A93-00025F12DED9}" type="datetimeFigureOut">
               <a:rPr kumimoji="1" lang="ja-JP" altLang="en-US" smtClean="0"/>
-              <a:t>2024/11/12</a:t>
+              <a:t>2025/3/3</a:t>
             </a:fld>
             <a:endParaRPr kumimoji="1" lang="ja-JP" altLang="en-US"/>
           </a:p>
@@ -1242,7 +1242,7 @@
           <a:p>
             <a:fld id="{E9CC885B-4903-4D54-9A93-00025F12DED9}" type="datetimeFigureOut">
               <a:rPr kumimoji="1" lang="ja-JP" altLang="en-US" smtClean="0"/>
-              <a:t>2024/11/12</a:t>
+              <a:t>2025/3/3</a:t>
             </a:fld>
             <a:endParaRPr kumimoji="1" lang="ja-JP" altLang="en-US"/>
           </a:p>
@@ -1571,7 +1571,7 @@
           <a:p>
             <a:fld id="{E9CC885B-4903-4D54-9A93-00025F12DED9}" type="datetimeFigureOut">
               <a:rPr kumimoji="1" lang="ja-JP" altLang="en-US" smtClean="0"/>
-              <a:t>2024/11/12</a:t>
+              <a:t>2025/3/3</a:t>
             </a:fld>
             <a:endParaRPr kumimoji="1" lang="ja-JP" altLang="en-US"/>
           </a:p>
@@ -2047,7 +2047,7 @@
           <a:p>
             <a:fld id="{E9CC885B-4903-4D54-9A93-00025F12DED9}" type="datetimeFigureOut">
               <a:rPr kumimoji="1" lang="ja-JP" altLang="en-US" smtClean="0"/>
-              <a:t>2024/11/12</a:t>
+              <a:t>2025/3/3</a:t>
             </a:fld>
             <a:endParaRPr kumimoji="1" lang="ja-JP" altLang="en-US"/>
           </a:p>
@@ -2188,7 +2188,7 @@
           <a:p>
             <a:fld id="{E9CC885B-4903-4D54-9A93-00025F12DED9}" type="datetimeFigureOut">
               <a:rPr kumimoji="1" lang="ja-JP" altLang="en-US" smtClean="0"/>
-              <a:t>2024/11/12</a:t>
+              <a:t>2025/3/3</a:t>
             </a:fld>
             <a:endParaRPr kumimoji="1" lang="ja-JP" altLang="en-US"/>
           </a:p>
@@ -2301,7 +2301,7 @@
           <a:p>
             <a:fld id="{E9CC885B-4903-4D54-9A93-00025F12DED9}" type="datetimeFigureOut">
               <a:rPr kumimoji="1" lang="ja-JP" altLang="en-US" smtClean="0"/>
-              <a:t>2024/11/12</a:t>
+              <a:t>2025/3/3</a:t>
             </a:fld>
             <a:endParaRPr kumimoji="1" lang="ja-JP" altLang="en-US"/>
           </a:p>
@@ -2644,7 +2644,7 @@
           <a:p>
             <a:fld id="{E9CC885B-4903-4D54-9A93-00025F12DED9}" type="datetimeFigureOut">
               <a:rPr kumimoji="1" lang="ja-JP" altLang="en-US" smtClean="0"/>
-              <a:t>2024/11/12</a:t>
+              <a:t>2025/3/3</a:t>
             </a:fld>
             <a:endParaRPr kumimoji="1" lang="ja-JP" altLang="en-US"/>
           </a:p>
@@ -2932,7 +2932,7 @@
           <a:p>
             <a:fld id="{E9CC885B-4903-4D54-9A93-00025F12DED9}" type="datetimeFigureOut">
               <a:rPr kumimoji="1" lang="ja-JP" altLang="en-US" smtClean="0"/>
-              <a:t>2024/11/12</a:t>
+              <a:t>2025/3/3</a:t>
             </a:fld>
             <a:endParaRPr kumimoji="1" lang="ja-JP" altLang="en-US"/>
           </a:p>
@@ -3205,7 +3205,7 @@
           <a:p>
             <a:fld id="{E9CC885B-4903-4D54-9A93-00025F12DED9}" type="datetimeFigureOut">
               <a:rPr kumimoji="1" lang="ja-JP" altLang="en-US" smtClean="0"/>
-              <a:t>2024/11/12</a:t>
+              <a:t>2025/3/3</a:t>
             </a:fld>
             <a:endParaRPr kumimoji="1" lang="ja-JP" altLang="en-US"/>
           </a:p>
@@ -4694,7 +4694,7 @@
             </a:r>
             <a:r>
               <a:rPr lang="ja-JP" altLang="en-US" sz="2400" dirty="0"/>
-              <a:t>関数で末尾に要素を削除します。</a:t>
+              <a:t>関数で末尾の要素を削除します。</a:t>
             </a:r>
             <a:endParaRPr lang="en-US" altLang="ja-JP" sz="2400" dirty="0"/>
           </a:p>
@@ -6038,7 +6038,7 @@
         <p:spPr>
           <a:xfrm>
             <a:off x="567542" y="1216429"/>
-            <a:ext cx="8186857" cy="3046988"/>
+            <a:ext cx="10649069" cy="2677656"/>
           </a:xfrm>
           <a:prstGeom prst="rect">
             <a:avLst/>
@@ -6112,7 +6112,7 @@
                   <a:srgbClr val="FF0000"/>
                 </a:solidFill>
               </a:rPr>
-              <a:t>固定配列よりも処理は重かったり、</a:t>
+              <a:t>固定配列よりも処理は重かったり、メモリは多く使ってしまいます。</a:t>
             </a:r>
             <a:endParaRPr lang="en-US" altLang="ja-JP" sz="2400" b="1" dirty="0">
               <a:solidFill>
@@ -6122,23 +6122,8 @@
           </a:p>
           <a:p>
             <a:r>
-              <a:rPr lang="ja-JP" altLang="en-US" sz="2400" b="1" dirty="0">
-                <a:solidFill>
-                  <a:srgbClr val="FF0000"/>
-                </a:solidFill>
-              </a:rPr>
-              <a:t>同じ件数で比べるとメモリは多く使ってしまいます。</a:t>
-            </a:r>
-            <a:endParaRPr lang="en-US" altLang="ja-JP" sz="2400" b="1" dirty="0">
-              <a:solidFill>
-                <a:srgbClr val="FF0000"/>
-              </a:solidFill>
-            </a:endParaRPr>
-          </a:p>
-          <a:p>
-            <a:r>
               <a:rPr lang="ja-JP" altLang="en-US" sz="2400" dirty="0"/>
-              <a:t>（微々たるものだとは思います）</a:t>
+              <a:t>（微々たるものだとは思いますが。。）</a:t>
             </a:r>
             <a:endParaRPr lang="en-US" altLang="ja-JP" sz="2400" dirty="0"/>
           </a:p>
